--- a/OLHD_장표.pptx
+++ b/OLHD_장표.pptx
@@ -1685,7 +1685,7 @@
                 <a:ea typeface="Malgun Gothic" pitchFamily="34" charset="-122"/>
                 <a:cs typeface="Malgun Gothic" pitchFamily="34" charset="-120"/>
               </a:rPr>
-              <a:t>빨간 칸(핀 개수 × 두께)이 비스듬히 깎이고 핀 두께 막대가 얇은 쪽에 몰린 것은 핀 갭(≥ 2 mm) 제약 때문</a:t>
+              <a:t>빨간 칸(핀 개수 × 두께)이 깎인 것은 핀 갭(≥ 2 mm) 제약 때문</a:t>
             </a:r>
             <a:endParaRPr lang="en-US" sz="950" dirty="0"/>
           </a:p>

--- a/OLHD_장표.pptx
+++ b/OLHD_장표.pptx
@@ -1438,7 +1438,7 @@
         </p:nvSpPr>
         <p:spPr>
           <a:xfrm>
-            <a:off x="813816" y="2926080"/>
+            <a:off x="813816" y="2889504"/>
             <a:ext cx="4846320" cy="256032"/>
           </a:xfrm>
           <a:prstGeom prst="rect">
@@ -1463,49 +1463,442 @@
                 <a:ea typeface="Malgun Gothic" pitchFamily="34" charset="-122"/>
                 <a:cs typeface="Malgun Gothic" pitchFamily="34" charset="-120"/>
               </a:rPr>
-              <a:t>OLHD란</a:t>
+              <a:t>DOE 기법 선정</a:t>
             </a:r>
             <a:endParaRPr lang="en-US" sz="1100" dirty="0"/>
           </a:p>
         </p:txBody>
       </p:sp>
-      <p:sp>
-        <p:nvSpPr>
-          <p:cNvPr id="19" name="Shape 17"/>
-          <p:cNvSpPr/>
-          <p:nvPr/>
-        </p:nvSpPr>
-        <p:spPr>
-          <a:xfrm>
-            <a:off x="813816" y="3218688"/>
-            <a:ext cx="4846320" cy="960120"/>
-          </a:xfrm>
-          <a:prstGeom prst="roundRect">
-            <a:avLst>
-              <a:gd name="adj" fmla="val 5714"/>
-            </a:avLst>
-          </a:prstGeom>
-          <a:solidFill>
-            <a:srgbClr val="EEF2F7"/>
-          </a:solidFill>
-          <a:ln w="12700">
-            <a:solidFill>
-              <a:srgbClr val="EEF2F7"/>
-            </a:solidFill>
-            <a:prstDash val="solid"/>
-          </a:ln>
-        </p:spPr>
-      </p:sp>
-      <p:sp>
-        <p:nvSpPr>
-          <p:cNvPr id="20" name="Text 18"/>
+      <p:graphicFrame>
+        <p:nvGraphicFramePr>
+          <p:cNvPr id="2" name="Table 0"/>
+          <p:cNvGraphicFramePr>
+            <a:graphicFrameLocks noGrp="1"/>
+          </p:cNvGraphicFramePr>
+          <p:nvPr>
+            <p:extLst>
+              <p:ext uri="{D42A27DB-BD31-4B8C-83A1-F6EECF244321}">
+                <p14:modId xmlns:p14="http://schemas.microsoft.com/office/powerpoint/2010/main" val="1579011935"/>
+              </p:ext>
+            </p:extLst>
+          </p:nvPr>
+        </p:nvGraphicFramePr>
+        <p:xfrm>
+          <a:off x="813816" y="3182112"/>
+          <a:ext cx="4846320" cy="914400"/>
+        </p:xfrm>
+        <a:graphic>
+          <a:graphicData uri="http://schemas.openxmlformats.org/drawingml/2006/table">
+            <a:tbl>
+              <a:tblPr/>
+              <a:tblGrid>
+                <a:gridCol w="1783080"/>
+                <a:gridCol w="3063240"/>
+              </a:tblGrid>
+              <a:tr h="292608">
+                <a:tc>
+                  <a:txBody>
+                    <a:bodyPr/>
+                    <a:lstStyle/>
+                    <a:p>
+                      <a:pPr indent="0" marL="0">
+                        <a:buNone/>
+                      </a:pPr>
+                      <a:r>
+                        <a:rPr lang="en-US" sz="930" b="1" dirty="0">
+                          <a:solidFill>
+                            <a:srgbClr val="16305B"/>
+                          </a:solidFill>
+                          <a:latin typeface="Malgun Gothic" pitchFamily="34" charset="0"/>
+                          <a:ea typeface="Malgun Gothic" pitchFamily="34" charset="-122"/>
+                          <a:cs typeface="Malgun Gothic" pitchFamily="34" charset="-120"/>
+                        </a:rPr>
+                        <a:t>방식</a:t>
+                      </a:r>
+                      <a:endParaRPr lang="en-US" sz="930" dirty="0">
+                        <a:latin typeface="Malgun Gothic" charset="0"/>
+                        <a:ea typeface="Malgun Gothic" charset="0"/>
+                        <a:cs typeface="Malgun Gothic" charset="0"/>
+                      </a:endParaRPr>
+                    </a:p>
+                  </a:txBody>
+                  <a:tcPr marL="50800" marR="50800" marT="25400" marB="25400" anchor="ctr">
+                    <a:lnL w="0" cap="flat" cmpd="sng" algn="ctr">
+                      <a:noFill/>
+                    </a:lnL>
+                    <a:lnR w="0" cap="flat" cmpd="sng" algn="ctr">
+                      <a:noFill/>
+                    </a:lnR>
+                    <a:lnT w="0" cap="flat" cmpd="sng" algn="ctr">
+                      <a:noFill/>
+                    </a:lnT>
+                    <a:lnB w="6350" cap="flat" cmpd="sng" algn="ctr">
+                      <a:solidFill>
+                        <a:srgbClr val="DDE3EB"/>
+                      </a:solidFill>
+                      <a:prstDash val="solid"/>
+                      <a:round/>
+                      <a:headEnd type="none" w="med" len="med"/>
+                      <a:tailEnd type="none" w="med" len="med"/>
+                    </a:lnB>
+                    <a:solidFill>
+                      <a:srgbClr val="EEF2F7"/>
+                    </a:solidFill>
+                  </a:tcPr>
+                </a:tc>
+                <a:tc>
+                  <a:txBody>
+                    <a:bodyPr/>
+                    <a:lstStyle/>
+                    <a:p>
+                      <a:pPr indent="0" marL="0">
+                        <a:buNone/>
+                      </a:pPr>
+                      <a:r>
+                        <a:rPr lang="en-US" sz="930" b="1" dirty="0">
+                          <a:solidFill>
+                            <a:srgbClr val="16305B"/>
+                          </a:solidFill>
+                          <a:latin typeface="Malgun Gothic" pitchFamily="34" charset="0"/>
+                          <a:ea typeface="Malgun Gothic" pitchFamily="34" charset="-122"/>
+                          <a:cs typeface="Malgun Gothic" pitchFamily="34" charset="-120"/>
+                        </a:rPr>
+                        <a:t>판정</a:t>
+                      </a:r>
+                      <a:endParaRPr lang="en-US" sz="930" dirty="0">
+                        <a:latin typeface="Malgun Gothic" charset="0"/>
+                        <a:ea typeface="Malgun Gothic" charset="0"/>
+                        <a:cs typeface="Malgun Gothic" charset="0"/>
+                      </a:endParaRPr>
+                    </a:p>
+                  </a:txBody>
+                  <a:tcPr marL="50800" marR="50800" marT="25400" marB="25400" anchor="ctr">
+                    <a:lnL w="0" cap="flat" cmpd="sng" algn="ctr">
+                      <a:noFill/>
+                    </a:lnL>
+                    <a:lnR w="0" cap="flat" cmpd="sng" algn="ctr">
+                      <a:noFill/>
+                    </a:lnR>
+                    <a:lnT w="0" cap="flat" cmpd="sng" algn="ctr">
+                      <a:noFill/>
+                    </a:lnT>
+                    <a:lnB w="6350" cap="flat" cmpd="sng" algn="ctr">
+                      <a:solidFill>
+                        <a:srgbClr val="DDE3EB"/>
+                      </a:solidFill>
+                      <a:prstDash val="solid"/>
+                      <a:round/>
+                      <a:headEnd type="none" w="med" len="med"/>
+                      <a:tailEnd type="none" w="med" len="med"/>
+                    </a:lnB>
+                    <a:solidFill>
+                      <a:srgbClr val="EEF2F7"/>
+                    </a:solidFill>
+                  </a:tcPr>
+                </a:tc>
+              </a:tr>
+              <a:tr h="292608">
+                <a:tc>
+                  <a:txBody>
+                    <a:bodyPr/>
+                    <a:lstStyle/>
+                    <a:p>
+                      <a:pPr indent="0" marL="0">
+                        <a:buNone/>
+                      </a:pPr>
+                      <a:r>
+                        <a:rPr lang="en-US" sz="930" dirty="0">
+                          <a:solidFill>
+                            <a:srgbClr val="1C2733"/>
+                          </a:solidFill>
+                          <a:latin typeface="Malgun Gothic" pitchFamily="34" charset="0"/>
+                          <a:ea typeface="Malgun Gothic" pitchFamily="34" charset="-122"/>
+                          <a:cs typeface="Malgun Gothic" pitchFamily="34" charset="-120"/>
+                        </a:rPr>
+                        <a:t>격자 전수탐색</a:t>
+                      </a:r>
+                      <a:endParaRPr lang="en-US" sz="930" dirty="0">
+                        <a:latin typeface="Malgun Gothic" charset="0"/>
+                        <a:ea typeface="Malgun Gothic" charset="0"/>
+                        <a:cs typeface="Malgun Gothic" charset="0"/>
+                      </a:endParaRPr>
+                    </a:p>
+                  </a:txBody>
+                  <a:tcPr marL="50800" marR="50800" marT="25400" marB="25400" anchor="ctr">
+                    <a:lnL w="0" cap="flat" cmpd="sng" algn="ctr">
+                      <a:noFill/>
+                    </a:lnL>
+                    <a:lnR w="0" cap="flat" cmpd="sng" algn="ctr">
+                      <a:noFill/>
+                    </a:lnR>
+                    <a:lnT w="0" cap="flat" cmpd="sng" algn="ctr">
+                      <a:noFill/>
+                    </a:lnT>
+                    <a:lnB w="6350" cap="flat" cmpd="sng" algn="ctr">
+                      <a:solidFill>
+                        <a:srgbClr val="DDE3EB"/>
+                      </a:solidFill>
+                      <a:prstDash val="solid"/>
+                      <a:round/>
+                      <a:headEnd type="none" w="med" len="med"/>
+                      <a:tailEnd type="none" w="med" len="med"/>
+                    </a:lnB>
+                  </a:tcPr>
+                </a:tc>
+                <a:tc>
+                  <a:txBody>
+                    <a:bodyPr/>
+                    <a:lstStyle/>
+                    <a:p>
+                      <a:pPr indent="0" marL="0">
+                        <a:buNone/>
+                      </a:pPr>
+                      <a:r>
+                        <a:rPr lang="en-US" sz="930" dirty="0">
+                          <a:solidFill>
+                            <a:srgbClr val="1C2733"/>
+                          </a:solidFill>
+                          <a:latin typeface="Malgun Gothic" pitchFamily="34" charset="0"/>
+                          <a:ea typeface="Malgun Gothic" pitchFamily="34" charset="-122"/>
+                          <a:cs typeface="Malgun Gothic" pitchFamily="34" charset="-120"/>
+                        </a:rPr>
+                        <a:t>✕   변수 8개 × 5수준만 해도 5⁸ = 39만 회</a:t>
+                      </a:r>
+                      <a:endParaRPr lang="en-US" sz="930" dirty="0">
+                        <a:latin typeface="Malgun Gothic" charset="0"/>
+                        <a:ea typeface="Malgun Gothic" charset="0"/>
+                        <a:cs typeface="Malgun Gothic" charset="0"/>
+                      </a:endParaRPr>
+                    </a:p>
+                  </a:txBody>
+                  <a:tcPr marL="50800" marR="50800" marT="25400" marB="25400" anchor="ctr">
+                    <a:lnL w="0" cap="flat" cmpd="sng" algn="ctr">
+                      <a:noFill/>
+                    </a:lnL>
+                    <a:lnR w="0" cap="flat" cmpd="sng" algn="ctr">
+                      <a:noFill/>
+                    </a:lnR>
+                    <a:lnT w="0" cap="flat" cmpd="sng" algn="ctr">
+                      <a:noFill/>
+                    </a:lnT>
+                    <a:lnB w="6350" cap="flat" cmpd="sng" algn="ctr">
+                      <a:solidFill>
+                        <a:srgbClr val="DDE3EB"/>
+                      </a:solidFill>
+                      <a:prstDash val="solid"/>
+                      <a:round/>
+                      <a:headEnd type="none" w="med" len="med"/>
+                      <a:tailEnd type="none" w="med" len="med"/>
+                    </a:lnB>
+                  </a:tcPr>
+                </a:tc>
+              </a:tr>
+              <a:tr h="292608">
+                <a:tc>
+                  <a:txBody>
+                    <a:bodyPr/>
+                    <a:lstStyle/>
+                    <a:p>
+                      <a:pPr indent="0" marL="0">
+                        <a:buNone/>
+                      </a:pPr>
+                      <a:r>
+                        <a:rPr lang="en-US" sz="930" dirty="0">
+                          <a:solidFill>
+                            <a:srgbClr val="1C2733"/>
+                          </a:solidFill>
+                          <a:latin typeface="Malgun Gothic" pitchFamily="34" charset="0"/>
+                          <a:ea typeface="Malgun Gothic" pitchFamily="34" charset="-122"/>
+                          <a:cs typeface="Malgun Gothic" pitchFamily="34" charset="-120"/>
+                        </a:rPr>
+                        <a:t>무작위 샘플링</a:t>
+                      </a:r>
+                      <a:endParaRPr lang="en-US" sz="930" dirty="0">
+                        <a:latin typeface="Malgun Gothic" charset="0"/>
+                        <a:ea typeface="Malgun Gothic" charset="0"/>
+                        <a:cs typeface="Malgun Gothic" charset="0"/>
+                      </a:endParaRPr>
+                    </a:p>
+                  </a:txBody>
+                  <a:tcPr marL="50800" marR="50800" marT="25400" marB="25400" anchor="ctr">
+                    <a:lnL w="0" cap="flat" cmpd="sng" algn="ctr">
+                      <a:noFill/>
+                    </a:lnL>
+                    <a:lnR w="0" cap="flat" cmpd="sng" algn="ctr">
+                      <a:noFill/>
+                    </a:lnR>
+                    <a:lnT w="0" cap="flat" cmpd="sng" algn="ctr">
+                      <a:noFill/>
+                    </a:lnT>
+                    <a:lnB w="6350" cap="flat" cmpd="sng" algn="ctr">
+                      <a:solidFill>
+                        <a:srgbClr val="DDE3EB"/>
+                      </a:solidFill>
+                      <a:prstDash val="solid"/>
+                      <a:round/>
+                      <a:headEnd type="none" w="med" len="med"/>
+                      <a:tailEnd type="none" w="med" len="med"/>
+                    </a:lnB>
+                  </a:tcPr>
+                </a:tc>
+                <a:tc>
+                  <a:txBody>
+                    <a:bodyPr/>
+                    <a:lstStyle/>
+                    <a:p>
+                      <a:pPr indent="0" marL="0">
+                        <a:buNone/>
+                      </a:pPr>
+                      <a:r>
+                        <a:rPr lang="en-US" sz="930" dirty="0">
+                          <a:solidFill>
+                            <a:srgbClr val="1C2733"/>
+                          </a:solidFill>
+                          <a:latin typeface="Malgun Gothic" pitchFamily="34" charset="0"/>
+                          <a:ea typeface="Malgun Gothic" pitchFamily="34" charset="-122"/>
+                          <a:cs typeface="Malgun Gothic" pitchFamily="34" charset="-120"/>
+                        </a:rPr>
+                        <a:t>✕   점이 한쪽에 몰리고 빈 영역 발생</a:t>
+                      </a:r>
+                      <a:endParaRPr lang="en-US" sz="930" dirty="0">
+                        <a:latin typeface="Malgun Gothic" charset="0"/>
+                        <a:ea typeface="Malgun Gothic" charset="0"/>
+                        <a:cs typeface="Malgun Gothic" charset="0"/>
+                      </a:endParaRPr>
+                    </a:p>
+                  </a:txBody>
+                  <a:tcPr marL="50800" marR="50800" marT="25400" marB="25400" anchor="ctr">
+                    <a:lnL w="0" cap="flat" cmpd="sng" algn="ctr">
+                      <a:noFill/>
+                    </a:lnL>
+                    <a:lnR w="0" cap="flat" cmpd="sng" algn="ctr">
+                      <a:noFill/>
+                    </a:lnR>
+                    <a:lnT w="0" cap="flat" cmpd="sng" algn="ctr">
+                      <a:noFill/>
+                    </a:lnT>
+                    <a:lnB w="6350" cap="flat" cmpd="sng" algn="ctr">
+                      <a:solidFill>
+                        <a:srgbClr val="DDE3EB"/>
+                      </a:solidFill>
+                      <a:prstDash val="solid"/>
+                      <a:round/>
+                      <a:headEnd type="none" w="med" len="med"/>
+                      <a:tailEnd type="none" w="med" len="med"/>
+                    </a:lnB>
+                  </a:tcPr>
+                </a:tc>
+              </a:tr>
+              <a:tr h="292608">
+                <a:tc>
+                  <a:txBody>
+                    <a:bodyPr/>
+                    <a:lstStyle/>
+                    <a:p>
+                      <a:pPr indent="0" marL="0">
+                        <a:buNone/>
+                      </a:pPr>
+                      <a:r>
+                        <a:rPr lang="en-US" sz="930" b="1" dirty="0">
+                          <a:solidFill>
+                            <a:srgbClr val="16305B"/>
+                          </a:solidFill>
+                          <a:latin typeface="Malgun Gothic" pitchFamily="34" charset="0"/>
+                          <a:ea typeface="Malgun Gothic" pitchFamily="34" charset="-122"/>
+                          <a:cs typeface="Malgun Gothic" pitchFamily="34" charset="-120"/>
+                        </a:rPr>
+                        <a:t>최적라틴방격법 (OLHD)</a:t>
+                      </a:r>
+                      <a:endParaRPr lang="en-US" sz="930" dirty="0">
+                        <a:latin typeface="Malgun Gothic" charset="0"/>
+                        <a:ea typeface="Malgun Gothic" charset="0"/>
+                        <a:cs typeface="Malgun Gothic" charset="0"/>
+                      </a:endParaRPr>
+                    </a:p>
+                  </a:txBody>
+                  <a:tcPr marL="50800" marR="50800" marT="25400" marB="25400" anchor="ctr">
+                    <a:lnL w="0" cap="flat" cmpd="sng" algn="ctr">
+                      <a:noFill/>
+                    </a:lnL>
+                    <a:lnR w="0" cap="flat" cmpd="sng" algn="ctr">
+                      <a:noFill/>
+                    </a:lnR>
+                    <a:lnT w="0" cap="flat" cmpd="sng" algn="ctr">
+                      <a:noFill/>
+                    </a:lnT>
+                    <a:lnB w="6350" cap="flat" cmpd="sng" algn="ctr">
+                      <a:solidFill>
+                        <a:srgbClr val="DDE3EB"/>
+                      </a:solidFill>
+                      <a:prstDash val="solid"/>
+                      <a:round/>
+                      <a:headEnd type="none" w="med" len="med"/>
+                      <a:tailEnd type="none" w="med" len="med"/>
+                    </a:lnB>
+                  </a:tcPr>
+                </a:tc>
+                <a:tc>
+                  <a:txBody>
+                    <a:bodyPr/>
+                    <a:lstStyle/>
+                    <a:p>
+                      <a:pPr indent="0" marL="0">
+                        <a:buNone/>
+                      </a:pPr>
+                      <a:r>
+                        <a:rPr lang="en-US" sz="930" b="1" dirty="0">
+                          <a:solidFill>
+                            <a:srgbClr val="16305B"/>
+                          </a:solidFill>
+                          <a:latin typeface="Malgun Gothic" pitchFamily="34" charset="0"/>
+                          <a:ea typeface="Malgun Gothic" pitchFamily="34" charset="-122"/>
+                          <a:cs typeface="Malgun Gothic" pitchFamily="34" charset="-120"/>
+                        </a:rPr>
+                        <a:t>○   80점으로 설계공간을 고르게 채움</a:t>
+                      </a:r>
+                      <a:endParaRPr lang="en-US" sz="930" dirty="0">
+                        <a:latin typeface="Malgun Gothic" charset="0"/>
+                        <a:ea typeface="Malgun Gothic" charset="0"/>
+                        <a:cs typeface="Malgun Gothic" charset="0"/>
+                      </a:endParaRPr>
+                    </a:p>
+                  </a:txBody>
+                  <a:tcPr marL="50800" marR="50800" marT="25400" marB="25400" anchor="ctr">
+                    <a:lnL w="0" cap="flat" cmpd="sng" algn="ctr">
+                      <a:noFill/>
+                    </a:lnL>
+                    <a:lnR w="0" cap="flat" cmpd="sng" algn="ctr">
+                      <a:noFill/>
+                    </a:lnR>
+                    <a:lnT w="0" cap="flat" cmpd="sng" algn="ctr">
+                      <a:noFill/>
+                    </a:lnT>
+                    <a:lnB w="6350" cap="flat" cmpd="sng" algn="ctr">
+                      <a:solidFill>
+                        <a:srgbClr val="DDE3EB"/>
+                      </a:solidFill>
+                      <a:prstDash val="solid"/>
+                      <a:round/>
+                      <a:headEnd type="none" w="med" len="med"/>
+                      <a:tailEnd type="none" w="med" len="med"/>
+                    </a:lnB>
+                  </a:tcPr>
+                </a:tc>
+              </a:tr>
+            </a:tbl>
+          </a:graphicData>
+        </a:graphic>
+      </p:graphicFrame>
+      <p:sp>
+        <p:nvSpPr>
+          <p:cNvPr id="20" name="Text 17"/>
           <p:cNvSpPr txBox="1"/>
           <p:nvPr/>
         </p:nvSpPr>
         <p:spPr>
           <a:xfrm>
-            <a:off x="960120" y="3218688"/>
-            <a:ext cx="4572000" cy="960120"/>
+            <a:off x="813816" y="4389120"/>
+            <a:ext cx="4846320" cy="237744"/>
           </a:xfrm>
           <a:prstGeom prst="rect">
             <a:avLst/>
@@ -1518,55 +1911,32 @@
           <a:lstStyle/>
           <a:p>
             <a:pPr indent="0" marL="0">
-              <a:lnSpc>
-                <a:spcPct val="125000"/>
-              </a:lnSpc>
               <a:buNone/>
             </a:pPr>
             <a:r>
-              <a:rPr lang="en-US" sz="950" b="1" dirty="0">
+              <a:rPr lang="en-US" sz="860" i="1" dirty="0">
                 <a:solidFill>
-                  <a:srgbClr val="16305B"/>
+                  <a:srgbClr val="6B7A8F"/>
                 </a:solidFill>
                 <a:latin typeface="Malgun Gothic" pitchFamily="34" charset="0"/>
                 <a:ea typeface="Malgun Gothic" pitchFamily="34" charset="-122"/>
                 <a:cs typeface="Malgun Gothic" pitchFamily="34" charset="-120"/>
               </a:rPr>
-              <a:t>최적라틴방격법 (Optimal Latin Hypercube Design)</a:t>
+              <a:t>OLHD: 각 변수 범위를 80구간으로 나눠 구간마다 한 점씩, 점 사이 거리를 최대로 배치</a:t>
             </a:r>
-            <a:endParaRPr lang="en-US" sz="950" dirty="0"/>
-          </a:p>
-          <a:p>
-            <a:pPr indent="0" marL="0">
-              <a:lnSpc>
-                <a:spcPct val="125000"/>
-              </a:lnSpc>
-              <a:buNone/>
-            </a:pPr>
-            <a:r>
-              <a:rPr lang="en-US" sz="950" dirty="0">
-                <a:solidFill>
-                  <a:srgbClr val="1C2733"/>
-                </a:solidFill>
-                <a:latin typeface="Malgun Gothic" pitchFamily="34" charset="0"/>
-                <a:ea typeface="Malgun Gothic" pitchFamily="34" charset="-122"/>
-                <a:cs typeface="Malgun Gothic" pitchFamily="34" charset="-120"/>
-              </a:rPr>
-              <a:t>각 변수 범위를 80구간으로 나눠 구간마다 한 점씩 쓰고, 점 사이 거리를 최대로 벌려 설계공간을 빈틈없이 채우는 실험계획법</a:t>
-            </a:r>
-            <a:endParaRPr lang="en-US" sz="950" dirty="0"/>
+            <a:endParaRPr lang="en-US" sz="860" dirty="0"/>
           </a:p>
         </p:txBody>
       </p:sp>
       <p:sp>
         <p:nvSpPr>
-          <p:cNvPr id="21" name="Text 19"/>
+          <p:cNvPr id="21" name="Text 18"/>
           <p:cNvSpPr txBox="1"/>
           <p:nvPr/>
         </p:nvSpPr>
         <p:spPr>
           <a:xfrm>
-            <a:off x="813816" y="4389120"/>
+            <a:off x="813816" y="4773168"/>
             <a:ext cx="4846320" cy="256032"/>
           </a:xfrm>
           <a:prstGeom prst="rect">
@@ -1599,14 +1969,14 @@
       </p:sp>
       <p:sp>
         <p:nvSpPr>
-          <p:cNvPr id="22" name="Text 20"/>
+          <p:cNvPr id="22" name="Text 19"/>
           <p:cNvSpPr txBox="1"/>
           <p:nvPr/>
         </p:nvSpPr>
         <p:spPr>
           <a:xfrm>
-            <a:off x="813816" y="4700016"/>
-            <a:ext cx="4846320" cy="1371600"/>
+            <a:off x="813816" y="5065776"/>
+            <a:ext cx="4846320" cy="1097280"/>
           </a:xfrm>
           <a:prstGeom prst="rect">
             <a:avLst/>
@@ -1693,7 +2063,7 @@
       </p:sp>
       <p:sp>
         <p:nvSpPr>
-          <p:cNvPr id="23" name="Shape 21"/>
+          <p:cNvPr id="23" name="Shape 20"/>
           <p:cNvSpPr/>
           <p:nvPr/>
         </p:nvSpPr>
